--- a/artifacts/editorial_unified_20261022/pptx/Figure01_Editorial.pptx
+++ b/artifacts/editorial_unified_20261022/pptx/Figure01_Editorial.pptx
@@ -483,9 +483,17 @@
 </a:theme>
 </file>
 
-<file path=ppt/slides/slide2.xml><?xml version="1.0" encoding="utf-8"?>
+<file path=ppt/slides/slide1.xml><?xml version="1.0" encoding="utf-8"?>
 <p:sld xmlns:p="http://schemas.openxmlformats.org/presentationml/2006/main">
   <p:cSld>
+    <p:bg>
+      <p:bgPr xmlns:a="http://schemas.openxmlformats.org/drawingml/2006/main">
+        <a:solidFill>
+          <a:srgbClr val="FFFFFF"/>
+        </a:solidFill>
+        <a:effectLst/>
+      </p:bgPr>
+    </p:bg>
     <p:spTree>
       <p:nvGrpSpPr>
         <p:cNvPr id="1" name=""/>
@@ -2475,7 +2483,7 @@
                   <a:ea typeface="Cambria"/>
                   <a:cs typeface="Cambria"/>
                 </a:rPr>
-                <a:t>Time-Series</a:t>
+                <a:t>Time Series</a:t>
               </a:r>
               <a:endParaRPr sz="2278">
                 <a:latin typeface="Arial"/>
@@ -2592,7 +2600,7 @@
                 <a:buNone/>
               </a:pPr>
               <a:r>
-                <a:rPr sz="2280" b="1">
+                <a:rPr sz="1928" b="1">
                   <a:solidFill>
                     <a:srgbClr val="222222"/>
                   </a:solidFill>
@@ -2672,7 +2680,7 @@
                   <a:ea typeface="Cambria"/>
                   <a:cs typeface="Cambria"/>
                 </a:rPr>
-                <a:t>Time-Series Agent?</a:t>
+                <a:t>Time Series Agent?</a:t>
               </a:r>
               <a:endParaRPr sz="1928">
                 <a:latin typeface="Comic Sans MS"/>
@@ -2717,7 +2725,7 @@
                 <a:buNone/>
               </a:pPr>
               <a:r>
-                <a:rPr sz="1984" b="1">
+                <a:rPr sz="1928" b="1">
                   <a:solidFill>
                     <a:srgbClr val="222222"/>
                   </a:solidFill>
@@ -2736,7 +2744,7 @@
                 <a:buNone/>
               </a:pPr>
               <a:r>
-                <a:rPr sz="1984" b="1">
+                <a:rPr sz="1928" b="1">
                   <a:solidFill>
                     <a:srgbClr val="222222"/>
                   </a:solidFill>
@@ -2789,7 +2797,7 @@
                 <a:buNone/>
               </a:pPr>
               <a:r>
-                <a:rPr sz="2032" b="1">
+                <a:rPr sz="1928" b="1">
                   <a:solidFill>
                     <a:srgbClr val="222222"/>
                   </a:solidFill>
@@ -2808,7 +2816,7 @@
                 <a:buNone/>
               </a:pPr>
               <a:r>
-                <a:rPr sz="2032" b="1">
+                <a:rPr sz="1928" b="1">
                   <a:solidFill>
                     <a:srgbClr val="222222"/>
                   </a:solidFill>
@@ -2861,7 +2869,7 @@
                 <a:buNone/>
               </a:pPr>
               <a:r>
-                <a:rPr sz="1688" b="1">
+                <a:rPr sz="1928" b="1">
                   <a:solidFill>
                     <a:srgbClr val="222222"/>
                   </a:solidFill>
@@ -2869,7 +2877,7 @@
                   <a:ea typeface="Cambria"/>
                   <a:cs typeface="Cambria"/>
                 </a:rPr>
-                <a:t>§ 5    General Time-Series</a:t>
+                <a:t>§ 5    General Time Series</a:t>
               </a:r>
               <a:endParaRPr sz="1688">
                 <a:latin typeface="Comic Sans MS"/>
@@ -2880,7 +2888,7 @@
                 <a:buNone/>
               </a:pPr>
               <a:r>
-                <a:rPr sz="1688" b="1">
+                <a:rPr sz="1928" b="1">
                   <a:solidFill>
                     <a:srgbClr val="222222"/>
                   </a:solidFill>
@@ -2933,7 +2941,7 @@
                 <a:buNone/>
               </a:pPr>
               <a:r>
-                <a:rPr sz="1688" b="1">
+                <a:rPr sz="1928" b="1">
                   <a:solidFill>
                     <a:srgbClr val="222222"/>
                   </a:solidFill>
@@ -2952,7 +2960,7 @@
                 <a:buNone/>
               </a:pPr>
               <a:r>
-                <a:rPr sz="1688" b="1">
+                <a:rPr sz="1928" b="1">
                   <a:solidFill>
                     <a:srgbClr val="222222"/>
                   </a:solidFill>
@@ -3005,7 +3013,7 @@
                 <a:buNone/>
               </a:pPr>
               <a:r>
-                <a:rPr sz="2088" b="1">
+                <a:rPr sz="1928" b="1">
                   <a:solidFill>
                     <a:srgbClr val="222222"/>
                   </a:solidFill>
@@ -3024,7 +3032,7 @@
                 <a:buNone/>
               </a:pPr>
               <a:r>
-                <a:rPr sz="2088" b="1">
+                <a:rPr sz="1928" b="1">
                   <a:solidFill>
                     <a:srgbClr val="222222"/>
                   </a:solidFill>
@@ -3077,7 +3085,7 @@
                 <a:buNone/>
               </a:pPr>
               <a:r>
-                <a:rPr sz="2088" b="1">
+                <a:rPr sz="1928" b="1">
                   <a:solidFill>
                     <a:srgbClr val="222222"/>
                   </a:solidFill>
@@ -3096,7 +3104,7 @@
                 <a:buNone/>
               </a:pPr>
               <a:r>
-                <a:rPr sz="2088" b="1">
+                <a:rPr sz="1928" b="1">
                   <a:solidFill>
                     <a:srgbClr val="222222"/>
                   </a:solidFill>
@@ -3149,7 +3157,7 @@
                 <a:buNone/>
               </a:pPr>
               <a:r>
-                <a:rPr sz="2576" b="1">
+                <a:rPr sz="1928" b="1">
                   <a:solidFill>
                     <a:srgbClr val="222222"/>
                   </a:solidFill>
@@ -3202,7 +3210,7 @@
                 <a:buNone/>
               </a:pPr>
               <a:r>
-                <a:rPr sz="2014" b="1">
+                <a:rPr sz="1700" b="1">
                   <a:solidFill>
                     <a:srgbClr val="222222"/>
                   </a:solidFill>
@@ -3221,7 +3229,7 @@
                 <a:buNone/>
               </a:pPr>
               <a:r>
-                <a:rPr sz="2014" b="1">
+                <a:rPr sz="1700" b="1">
                   <a:solidFill>
                     <a:srgbClr val="222222"/>
                   </a:solidFill>
@@ -3274,7 +3282,7 @@
                 <a:buNone/>
               </a:pPr>
               <a:r>
-                <a:rPr sz="2014" b="1">
+                <a:rPr sz="1700" b="1">
                   <a:solidFill>
                     <a:srgbClr val="222222"/>
                   </a:solidFill>
@@ -3293,7 +3301,7 @@
                 <a:buNone/>
               </a:pPr>
               <a:r>
-                <a:rPr sz="2014" b="1">
+                <a:rPr sz="1700" b="1">
                   <a:solidFill>
                     <a:srgbClr val="222222"/>
                   </a:solidFill>
@@ -3346,7 +3354,7 @@
                 <a:buNone/>
               </a:pPr>
               <a:r>
-                <a:rPr sz="1853" b="1">
+                <a:rPr sz="1700" b="1">
                   <a:solidFill>
                     <a:srgbClr val="222222"/>
                   </a:solidFill>
@@ -3365,7 +3373,7 @@
                 <a:buNone/>
               </a:pPr>
               <a:r>
-                <a:rPr sz="1853" b="1">
+                <a:rPr sz="1700" b="1">
                   <a:solidFill>
                     <a:srgbClr val="222222"/>
                   </a:solidFill>
@@ -3384,7 +3392,7 @@
                 <a:buNone/>
               </a:pPr>
               <a:r>
-                <a:rPr sz="1853" b="1">
+                <a:rPr sz="1700" b="1">
                   <a:solidFill>
                     <a:srgbClr val="222222"/>
                   </a:solidFill>
@@ -3437,7 +3445,7 @@
                 <a:buNone/>
               </a:pPr>
               <a:r>
-                <a:rPr sz="1836" b="1">
+                <a:rPr sz="1700" b="1">
                   <a:solidFill>
                     <a:srgbClr val="222222"/>
                   </a:solidFill>
@@ -3456,7 +3464,7 @@
                 <a:buNone/>
               </a:pPr>
               <a:r>
-                <a:rPr sz="1836" b="1">
+                <a:rPr sz="1700" b="1">
                   <a:solidFill>
                     <a:srgbClr val="222222"/>
                   </a:solidFill>
@@ -3581,7 +3589,7 @@
                 <a:buNone/>
               </a:pPr>
               <a:r>
-                <a:rPr sz="1606" b="1">
+                <a:rPr sz="1700" b="1">
                   <a:solidFill>
                     <a:srgbClr val="222222"/>
                   </a:solidFill>
@@ -3600,7 +3608,7 @@
                 <a:buNone/>
               </a:pPr>
               <a:r>
-                <a:rPr sz="1606" b="1">
+                <a:rPr sz="1700" b="1">
                   <a:solidFill>
                     <a:srgbClr val="222222"/>
                   </a:solidFill>
@@ -3653,7 +3661,7 @@
                 <a:buNone/>
               </a:pPr>
               <a:r>
-                <a:rPr sz="1590" b="1">
+                <a:rPr sz="1700" b="1">
                   <a:solidFill>
                     <a:srgbClr val="222222"/>
                   </a:solidFill>
@@ -3661,7 +3669,7 @@
                   <a:ea typeface="Cambria"/>
                   <a:cs typeface="Cambria"/>
                 </a:rPr>
-                <a:t>ModernTSF                  TimeSeriesGym</a:t>
+                <a:t>Numerical libraries      Benchmark families</a:t>
               </a:r>
               <a:endParaRPr sz="1590">
                 <a:latin typeface="Arial"/>
@@ -3672,7 +3680,7 @@
                 <a:buNone/>
               </a:pPr>
               <a:r>
-                <a:rPr sz="1590" b="1">
+                <a:rPr sz="1700" b="1">
                   <a:solidFill>
                     <a:srgbClr val="222222"/>
                   </a:solidFill>
@@ -3725,7 +3733,7 @@
                 <a:buNone/>
               </a:pPr>
               <a:r>
-                <a:rPr sz="1572" b="1">
+                <a:rPr sz="1700" b="1">
                   <a:solidFill>
                     <a:srgbClr val="222222"/>
                   </a:solidFill>
@@ -3744,7 +3752,7 @@
                 <a:buNone/>
               </a:pPr>
               <a:r>
-                <a:rPr sz="1572" b="1">
+                <a:rPr sz="1700" b="1">
                   <a:solidFill>
                     <a:srgbClr val="222222"/>
                   </a:solidFill>
@@ -3797,7 +3805,7 @@
                 <a:buNone/>
               </a:pPr>
               <a:r>
-                <a:rPr sz="2014" b="1">
+                <a:rPr sz="1700" b="1">
                   <a:solidFill>
                     <a:srgbClr val="222222"/>
                   </a:solidFill>
@@ -3816,7 +3824,7 @@
                 <a:buNone/>
               </a:pPr>
               <a:r>
-                <a:rPr sz="2014" b="1">
+                <a:rPr sz="1700" b="1">
                   <a:solidFill>
                     <a:srgbClr val="222222"/>
                   </a:solidFill>
